--- a/03-pca/slides/Análisis de Componentes Principales - UDEM.pptx
+++ b/03-pca/slides/Análisis de Componentes Principales - UDEM.pptx
@@ -11082,7 +11082,7 @@
                 </a:solidFill>
                 <a:latin typeface="Calibri"/>
               </a:rPr>
-              <a:t>•  Compara resultados con </a:t>
+              <a:t>•  Compara silhouettes en el </a:t>
             </a:r>
             <a:r>
               <a:rPr sz="1200" b="1" i="0">
@@ -11091,7 +11091,7 @@
                 </a:solidFill>
                 <a:latin typeface="Calibri"/>
               </a:rPr>
-              <a:t>ARI</a:t>
+              <a:t>mismo espacio</a:t>
             </a:r>
             <a:r>
               <a:rPr sz="1200" b="0" i="0">
@@ -11100,7 +11100,7 @@
                 </a:solidFill>
                 <a:latin typeface="Calibri"/>
               </a:rPr>
-              <a:t> o en el mismo espacio</a:t>
+              <a:t> de referencia</a:t>
             </a:r>
           </a:p>
         </p:txBody>
